--- a/docs/summer-presentation.pptx
+++ b/docs/summer-presentation.pptx
@@ -319,17 +319,7 @@
           <a:bodyPr/>
           <a:lstStyle/>
           <a:p>
-            <a:r>
-              <a:t>Set expectations in one sentence: this is a progress report on a project that works end to end but is not finished, and you will be clear about which parts are proven and which are not.</a:t>
-            </a:r>
-          </a:p>
-          <a:p>
-            <a:endParaRPr/>
-          </a:p>
-          <a:p>
-            <a:r>
-              <a:t>If you have the array with you, hold it up here. It is small, and people are surprised by that.</a:t>
-            </a:r>
+            <a:endParaRPr dirty="0"/>
           </a:p>
         </p:txBody>
       </p:sp>
@@ -1719,33 +1709,7 @@
           <a:bodyPr/>
           <a:lstStyle/>
           <a:p>
-            <a:r>
-              <a:t>The 'this is real' slide. Hold the array up here if you brought it, because the photo makes it look larger than it is.</a:t>
-            </a:r>
-          </a:p>
-          <a:p>
-            <a:endParaRPr/>
-          </a:p>
-          <a:p>
-            <a:r>
-              <a:t>Point at the four corners as you name them: top-left is mic0, top-right mic1, bottom-left mic2, bottom-right mic3, and that order is wired, not chosen afterwards. The firmware always emits the channels in that order, so a mislabelled corner would show up as a reflected bearing with every delay still correct.</a:t>
-            </a:r>
-          </a:p>
-          <a:p>
-            <a:endParaRPr/>
-          </a:p>
-          <a:p>
-            <a:r>
-              <a:t>The ruler is worth one sentence. The array dimensions came off that ruler, measured on the mic ports rather than the header pins, and it is good to about half a millimetre. That is not the limiting error: 1 mm is roughly 0.047 samples, well under a degree. It is lying below the board in this shot, it is not a measurement being taken.</a:t>
-            </a:r>
-          </a:p>
-          <a:p>
-            <a:endParaRPr/>
-          </a:p>
-          <a:p>
-            <a:r>
-              <a:t>Nothing here is a custom PCB. It is breadboard, jumper wire and a development board, and it still lands inside a degree and a half.</a:t>
-            </a:r>
+            <a:endParaRPr dirty="0"/>
           </a:p>
         </p:txBody>
       </p:sp>
